--- a/BTP_presentation.pptx
+++ b/BTP_presentation.pptx
@@ -15241,7 +15241,7 @@
                 <a:ea typeface="Cambria" pitchFamily="34" charset="-122"/>
                 <a:cs typeface="Cambria" pitchFamily="34" charset="-120"/>
               </a:rPr>
-              <a:t>Our result: the same model, the same data, collapses from R2 +0.15 to -0.22</a:t>
+              <a:t>Our result: honest splits put every method behind the baseline</a:t>
             </a:r>
             <a:endParaRPr lang="en-US" sz="2700" dirty="0"/>
           </a:p>
@@ -15262,7 +15262,7 @@
           </p:nvPr>
         </p:nvGraphicFramePr>
         <p:xfrm>
-          <a:off x="548640" y="1463040"/>
+          <a:off x="548640" y="1417320"/>
           <a:ext cx="6949440" cy="914400"/>
         </p:xfrm>
         <a:graphic>
@@ -15270,11 +15270,12 @@
             <a:tbl>
               <a:tblPr/>
               <a:tblGrid>
-                <a:gridCol w="2926080"/>
-                <a:gridCol w="2011680"/>
-                <a:gridCol w="2011680"/>
+                <a:gridCol w="2286000"/>
+                <a:gridCol w="1463040"/>
+                <a:gridCol w="1691640"/>
+                <a:gridCol w="1508760"/>
               </a:tblGrid>
-              <a:tr h="329184">
+              <a:tr h="301752">
                 <a:tc>
                   <a:txBody>
                     <a:bodyPr/>
@@ -15283,7 +15284,7 @@
                       <a:pPr algn="l" indent="0" marL="0">
                         <a:buNone/>
                       </a:pPr>
-                      <a:endParaRPr lang="en-US" sz="1250" dirty="0">
+                      <a:endParaRPr lang="en-US" sz="1150" dirty="0">
                         <a:latin typeface="Calibri" charset="0"/>
                         <a:ea typeface="Calibri" charset="0"/>
                         <a:cs typeface="Calibri" charset="0"/>
@@ -15341,7 +15342,7 @@
                         <a:buNone/>
                       </a:pPr>
                       <a:r>
-                        <a:rPr lang="en-US" sz="1250" b="1" dirty="0">
+                        <a:rPr lang="en-US" sz="1150" b="1" dirty="0">
                           <a:solidFill>
                             <a:srgbClr val="FFFFFF"/>
                           </a:solidFill>
@@ -15349,9 +15350,9 @@
                           <a:ea typeface="Calibri" pitchFamily="34" charset="-122"/>
                           <a:cs typeface="Calibri" pitchFamily="34" charset="-120"/>
                         </a:rPr>
-                        <a:t>Random split</a:t>
+                        <a:t>Random</a:t>
                       </a:r>
-                      <a:endParaRPr lang="en-US" sz="1250" dirty="0">
+                      <a:endParaRPr lang="en-US" sz="1150" dirty="0">
                         <a:latin typeface="Calibri" charset="0"/>
                         <a:ea typeface="Calibri" charset="0"/>
                         <a:cs typeface="Calibri" charset="0"/>
@@ -15409,7 +15410,7 @@
                         <a:buNone/>
                       </a:pPr>
                       <a:r>
-                        <a:rPr lang="en-US" sz="1250" b="1" dirty="0">
+                        <a:rPr lang="en-US" sz="1150" b="1" dirty="0">
                           <a:solidFill>
                             <a:srgbClr val="FFFFFF"/>
                           </a:solidFill>
@@ -15417,9 +15418,9 @@
                           <a:ea typeface="Calibri" pitchFamily="34" charset="-122"/>
                           <a:cs typeface="Calibri" pitchFamily="34" charset="-120"/>
                         </a:rPr>
-                        <a:t>Subject-aware split</a:t>
+                        <a:t>Subject-aware</a:t>
                       </a:r>
-                      <a:endParaRPr lang="en-US" sz="1250" dirty="0">
+                      <a:endParaRPr lang="en-US" sz="1150" dirty="0">
                         <a:latin typeface="Calibri" charset="0"/>
                         <a:ea typeface="Calibri" charset="0"/>
                         <a:cs typeface="Calibri" charset="0"/>
@@ -15468,8 +15469,6 @@
                     </a:solidFill>
                   </a:tcPr>
                 </a:tc>
-              </a:tr>
-              <a:tr h="329184">
                 <a:tc>
                   <a:txBody>
                     <a:bodyPr/>
@@ -15479,7 +15478,77 @@
                         <a:buNone/>
                       </a:pPr>
                       <a:r>
-                        <a:rPr lang="en-US" sz="1250" dirty="0">
+                        <a:rPr lang="en-US" sz="1150" b="1" dirty="0">
+                          <a:solidFill>
+                            <a:srgbClr val="FFFFFF"/>
+                          </a:solidFill>
+                          <a:latin typeface="Calibri" pitchFamily="34" charset="0"/>
+                          <a:ea typeface="Calibri" pitchFamily="34" charset="-122"/>
+                          <a:cs typeface="Calibri" pitchFamily="34" charset="-120"/>
+                        </a:rPr>
+                        <a:t>Leave-one-out</a:t>
+                      </a:r>
+                      <a:endParaRPr lang="en-US" sz="1150" dirty="0">
+                        <a:latin typeface="Calibri" charset="0"/>
+                        <a:ea typeface="Calibri" charset="0"/>
+                        <a:cs typeface="Calibri" charset="0"/>
+                      </a:endParaRPr>
+                    </a:p>
+                  </a:txBody>
+                  <a:tcPr marL="91440" marR="91440" marT="45720" marB="45720" anchor="ctr">
+                    <a:lnL w="6350" cap="flat" cmpd="sng" algn="ctr">
+                      <a:solidFill>
+                        <a:srgbClr val="D5E2E6"/>
+                      </a:solidFill>
+                      <a:prstDash val="solid"/>
+                      <a:round/>
+                      <a:headEnd type="none" w="med" len="med"/>
+                      <a:tailEnd type="none" w="med" len="med"/>
+                    </a:lnL>
+                    <a:lnR w="6350" cap="flat" cmpd="sng" algn="ctr">
+                      <a:solidFill>
+                        <a:srgbClr val="D5E2E6"/>
+                      </a:solidFill>
+                      <a:prstDash val="solid"/>
+                      <a:round/>
+                      <a:headEnd type="none" w="med" len="med"/>
+                      <a:tailEnd type="none" w="med" len="med"/>
+                    </a:lnR>
+                    <a:lnT w="6350" cap="flat" cmpd="sng" algn="ctr">
+                      <a:solidFill>
+                        <a:srgbClr val="D5E2E6"/>
+                      </a:solidFill>
+                      <a:prstDash val="solid"/>
+                      <a:round/>
+                      <a:headEnd type="none" w="med" len="med"/>
+                      <a:tailEnd type="none" w="med" len="med"/>
+                    </a:lnT>
+                    <a:lnB w="6350" cap="flat" cmpd="sng" algn="ctr">
+                      <a:solidFill>
+                        <a:srgbClr val="D5E2E6"/>
+                      </a:solidFill>
+                      <a:prstDash val="solid"/>
+                      <a:round/>
+                      <a:headEnd type="none" w="med" len="med"/>
+                      <a:tailEnd type="none" w="med" len="med"/>
+                    </a:lnB>
+                    <a:solidFill>
+                      <a:srgbClr val="0B2F3A"/>
+                    </a:solidFill>
+                  </a:tcPr>
+                </a:tc>
+              </a:tr>
+              <a:tr h="301752">
+                <a:tc>
+                  <a:txBody>
+                    <a:bodyPr/>
+                    <a:lstStyle/>
+                    <a:p>
+                      <a:pPr algn="l" indent="0" marL="0">
+                        <a:buNone/>
+                      </a:pPr>
+                      <a:r>
+                        <a:rPr lang="en-US" sz="1150" dirty="0">
                           <a:solidFill>
                             <a:srgbClr val="0B2F3A"/>
                           </a:solidFill>
@@ -15489,7 +15558,7 @@
                         </a:rPr>
                         <a:t>Best single model (R2)</a:t>
                       </a:r>
-                      <a:endParaRPr lang="en-US" sz="1250" dirty="0">
+                      <a:endParaRPr lang="en-US" sz="1150" dirty="0">
                         <a:latin typeface="Calibri" charset="0"/>
                         <a:ea typeface="Calibri" charset="0"/>
                         <a:cs typeface="Calibri" charset="0"/>
@@ -15547,7 +15616,7 @@
                         <a:buNone/>
                       </a:pPr>
                       <a:r>
-                        <a:rPr lang="en-US" sz="1250" dirty="0">
+                        <a:rPr lang="en-US" sz="1150" dirty="0">
                           <a:solidFill>
                             <a:srgbClr val="0B2F3A"/>
                           </a:solidFill>
@@ -15557,7 +15626,7 @@
                         </a:rPr>
                         <a:t>+0.194</a:t>
                       </a:r>
-                      <a:endParaRPr lang="en-US" sz="1250" dirty="0">
+                      <a:endParaRPr lang="en-US" sz="1150" dirty="0">
                         <a:latin typeface="Calibri" charset="0"/>
                         <a:ea typeface="Calibri" charset="0"/>
                         <a:cs typeface="Calibri" charset="0"/>
@@ -15615,7 +15684,7 @@
                         <a:buNone/>
                       </a:pPr>
                       <a:r>
-                        <a:rPr lang="en-US" sz="1250" dirty="0">
+                        <a:rPr lang="en-US" sz="1150" dirty="0">
                           <a:solidFill>
                             <a:srgbClr val="0B2F3A"/>
                           </a:solidFill>
@@ -15625,7 +15694,7 @@
                         </a:rPr>
                         <a:t>-0.243</a:t>
                       </a:r>
-                      <a:endParaRPr lang="en-US" sz="1250" dirty="0">
+                      <a:endParaRPr lang="en-US" sz="1150" dirty="0">
                         <a:latin typeface="Calibri" charset="0"/>
                         <a:ea typeface="Calibri" charset="0"/>
                         <a:cs typeface="Calibri" charset="0"/>
@@ -15674,8 +15743,6 @@
                     </a:solidFill>
                   </a:tcPr>
                 </a:tc>
-              </a:tr>
-              <a:tr h="329184">
                 <a:tc>
                   <a:txBody>
                     <a:bodyPr/>
@@ -15685,7 +15752,77 @@
                         <a:buNone/>
                       </a:pPr>
                       <a:r>
-                        <a:rPr lang="en-US" sz="1250" dirty="0">
+                        <a:rPr lang="en-US" sz="1150" dirty="0">
+                          <a:solidFill>
+                            <a:srgbClr val="0B2F3A"/>
+                          </a:solidFill>
+                          <a:latin typeface="Calibri" pitchFamily="34" charset="0"/>
+                          <a:ea typeface="Calibri" pitchFamily="34" charset="-122"/>
+                          <a:cs typeface="Calibri" pitchFamily="34" charset="-120"/>
+                        </a:rPr>
+                        <a:t>-0.092</a:t>
+                      </a:r>
+                      <a:endParaRPr lang="en-US" sz="1150" dirty="0">
+                        <a:latin typeface="Calibri" charset="0"/>
+                        <a:ea typeface="Calibri" charset="0"/>
+                        <a:cs typeface="Calibri" charset="0"/>
+                      </a:endParaRPr>
+                    </a:p>
+                  </a:txBody>
+                  <a:tcPr marL="91440" marR="91440" marT="45720" marB="45720" anchor="ctr">
+                    <a:lnL w="6350" cap="flat" cmpd="sng" algn="ctr">
+                      <a:solidFill>
+                        <a:srgbClr val="D5E2E6"/>
+                      </a:solidFill>
+                      <a:prstDash val="solid"/>
+                      <a:round/>
+                      <a:headEnd type="none" w="med" len="med"/>
+                      <a:tailEnd type="none" w="med" len="med"/>
+                    </a:lnL>
+                    <a:lnR w="6350" cap="flat" cmpd="sng" algn="ctr">
+                      <a:solidFill>
+                        <a:srgbClr val="D5E2E6"/>
+                      </a:solidFill>
+                      <a:prstDash val="solid"/>
+                      <a:round/>
+                      <a:headEnd type="none" w="med" len="med"/>
+                      <a:tailEnd type="none" w="med" len="med"/>
+                    </a:lnR>
+                    <a:lnT w="6350" cap="flat" cmpd="sng" algn="ctr">
+                      <a:solidFill>
+                        <a:srgbClr val="D5E2E6"/>
+                      </a:solidFill>
+                      <a:prstDash val="solid"/>
+                      <a:round/>
+                      <a:headEnd type="none" w="med" len="med"/>
+                      <a:tailEnd type="none" w="med" len="med"/>
+                    </a:lnT>
+                    <a:lnB w="6350" cap="flat" cmpd="sng" algn="ctr">
+                      <a:solidFill>
+                        <a:srgbClr val="D5E2E6"/>
+                      </a:solidFill>
+                      <a:prstDash val="solid"/>
+                      <a:round/>
+                      <a:headEnd type="none" w="med" len="med"/>
+                      <a:tailEnd type="none" w="med" len="med"/>
+                    </a:lnB>
+                    <a:solidFill>
+                      <a:srgbClr val="FFFFFF"/>
+                    </a:solidFill>
+                  </a:tcPr>
+                </a:tc>
+              </a:tr>
+              <a:tr h="301752">
+                <a:tc>
+                  <a:txBody>
+                    <a:bodyPr/>
+                    <a:lstStyle/>
+                    <a:p>
+                      <a:pPr algn="l" indent="0" marL="0">
+                        <a:buNone/>
+                      </a:pPr>
+                      <a:r>
+                        <a:rPr lang="en-US" sz="1150" dirty="0">
                           <a:solidFill>
                             <a:srgbClr val="0B2F3A"/>
                           </a:solidFill>
@@ -15695,7 +15832,7 @@
                         </a:rPr>
                         <a:t>Choquet fusion (R2)</a:t>
                       </a:r>
-                      <a:endParaRPr lang="en-US" sz="1250" dirty="0">
+                      <a:endParaRPr lang="en-US" sz="1150" dirty="0">
                         <a:latin typeface="Calibri" charset="0"/>
                         <a:ea typeface="Calibri" charset="0"/>
                         <a:cs typeface="Calibri" charset="0"/>
@@ -15753,7 +15890,7 @@
                         <a:buNone/>
                       </a:pPr>
                       <a:r>
-                        <a:rPr lang="en-US" sz="1250" dirty="0">
+                        <a:rPr lang="en-US" sz="1150" dirty="0">
                           <a:solidFill>
                             <a:srgbClr val="0B2F3A"/>
                           </a:solidFill>
@@ -15763,7 +15900,7 @@
                         </a:rPr>
                         <a:t>+0.149</a:t>
                       </a:r>
-                      <a:endParaRPr lang="en-US" sz="1250" dirty="0">
+                      <a:endParaRPr lang="en-US" sz="1150" dirty="0">
                         <a:latin typeface="Calibri" charset="0"/>
                         <a:ea typeface="Calibri" charset="0"/>
                         <a:cs typeface="Calibri" charset="0"/>
@@ -15821,7 +15958,7 @@
                         <a:buNone/>
                       </a:pPr>
                       <a:r>
-                        <a:rPr lang="en-US" sz="1250" dirty="0">
+                        <a:rPr lang="en-US" sz="1150" dirty="0">
                           <a:solidFill>
                             <a:srgbClr val="0B2F3A"/>
                           </a:solidFill>
@@ -15831,7 +15968,7 @@
                         </a:rPr>
                         <a:t>-0.223</a:t>
                       </a:r>
-                      <a:endParaRPr lang="en-US" sz="1250" dirty="0">
+                      <a:endParaRPr lang="en-US" sz="1150" dirty="0">
                         <a:latin typeface="Calibri" charset="0"/>
                         <a:ea typeface="Calibri" charset="0"/>
                         <a:cs typeface="Calibri" charset="0"/>
@@ -15880,8 +16017,6 @@
                     </a:solidFill>
                   </a:tcPr>
                 </a:tc>
-              </a:tr>
-              <a:tr h="329184">
                 <a:tc>
                   <a:txBody>
                     <a:bodyPr/>
@@ -15891,7 +16026,77 @@
                         <a:buNone/>
                       </a:pPr>
                       <a:r>
-                        <a:rPr lang="en-US" sz="1250" dirty="0">
+                        <a:rPr lang="en-US" sz="1150" dirty="0">
+                          <a:solidFill>
+                            <a:srgbClr val="0B2F3A"/>
+                          </a:solidFill>
+                          <a:latin typeface="Calibri" pitchFamily="34" charset="0"/>
+                          <a:ea typeface="Calibri" pitchFamily="34" charset="-122"/>
+                          <a:cs typeface="Calibri" pitchFamily="34" charset="-120"/>
+                        </a:rPr>
+                        <a:t>-0.097</a:t>
+                      </a:r>
+                      <a:endParaRPr lang="en-US" sz="1150" dirty="0">
+                        <a:latin typeface="Calibri" charset="0"/>
+                        <a:ea typeface="Calibri" charset="0"/>
+                        <a:cs typeface="Calibri" charset="0"/>
+                      </a:endParaRPr>
+                    </a:p>
+                  </a:txBody>
+                  <a:tcPr marL="91440" marR="91440" marT="45720" marB="45720" anchor="ctr">
+                    <a:lnL w="6350" cap="flat" cmpd="sng" algn="ctr">
+                      <a:solidFill>
+                        <a:srgbClr val="D5E2E6"/>
+                      </a:solidFill>
+                      <a:prstDash val="solid"/>
+                      <a:round/>
+                      <a:headEnd type="none" w="med" len="med"/>
+                      <a:tailEnd type="none" w="med" len="med"/>
+                    </a:lnL>
+                    <a:lnR w="6350" cap="flat" cmpd="sng" algn="ctr">
+                      <a:solidFill>
+                        <a:srgbClr val="D5E2E6"/>
+                      </a:solidFill>
+                      <a:prstDash val="solid"/>
+                      <a:round/>
+                      <a:headEnd type="none" w="med" len="med"/>
+                      <a:tailEnd type="none" w="med" len="med"/>
+                    </a:lnR>
+                    <a:lnT w="6350" cap="flat" cmpd="sng" algn="ctr">
+                      <a:solidFill>
+                        <a:srgbClr val="D5E2E6"/>
+                      </a:solidFill>
+                      <a:prstDash val="solid"/>
+                      <a:round/>
+                      <a:headEnd type="none" w="med" len="med"/>
+                      <a:tailEnd type="none" w="med" len="med"/>
+                    </a:lnT>
+                    <a:lnB w="6350" cap="flat" cmpd="sng" algn="ctr">
+                      <a:solidFill>
+                        <a:srgbClr val="D5E2E6"/>
+                      </a:solidFill>
+                      <a:prstDash val="solid"/>
+                      <a:round/>
+                      <a:headEnd type="none" w="med" len="med"/>
+                      <a:tailEnd type="none" w="med" len="med"/>
+                    </a:lnB>
+                    <a:solidFill>
+                      <a:srgbClr val="EAF2F4"/>
+                    </a:solidFill>
+                  </a:tcPr>
+                </a:tc>
+              </a:tr>
+              <a:tr h="301752">
+                <a:tc>
+                  <a:txBody>
+                    <a:bodyPr/>
+                    <a:lstStyle/>
+                    <a:p>
+                      <a:pPr algn="l" indent="0" marL="0">
+                        <a:buNone/>
+                      </a:pPr>
+                      <a:r>
+                        <a:rPr lang="en-US" sz="1150" dirty="0">
                           <a:solidFill>
                             <a:srgbClr val="0B2F3A"/>
                           </a:solidFill>
@@ -15901,7 +16106,7 @@
                         </a:rPr>
                         <a:t>No-skill baseline (R2)</a:t>
                       </a:r>
-                      <a:endParaRPr lang="en-US" sz="1250" dirty="0">
+                      <a:endParaRPr lang="en-US" sz="1150" dirty="0">
                         <a:latin typeface="Calibri" charset="0"/>
                         <a:ea typeface="Calibri" charset="0"/>
                         <a:cs typeface="Calibri" charset="0"/>
@@ -15959,7 +16164,7 @@
                         <a:buNone/>
                       </a:pPr>
                       <a:r>
-                        <a:rPr lang="en-US" sz="1250" dirty="0">
+                        <a:rPr lang="en-US" sz="1150" dirty="0">
                           <a:solidFill>
                             <a:srgbClr val="0B2F3A"/>
                           </a:solidFill>
@@ -15969,7 +16174,7 @@
                         </a:rPr>
                         <a:t>-0.000</a:t>
                       </a:r>
-                      <a:endParaRPr lang="en-US" sz="1250" dirty="0">
+                      <a:endParaRPr lang="en-US" sz="1150" dirty="0">
                         <a:latin typeface="Calibri" charset="0"/>
                         <a:ea typeface="Calibri" charset="0"/>
                         <a:cs typeface="Calibri" charset="0"/>
@@ -16027,7 +16232,7 @@
                         <a:buNone/>
                       </a:pPr>
                       <a:r>
-                        <a:rPr lang="en-US" sz="1250" dirty="0">
+                        <a:rPr lang="en-US" sz="1150" dirty="0">
                           <a:solidFill>
                             <a:srgbClr val="0B2F3A"/>
                           </a:solidFill>
@@ -16037,7 +16242,7 @@
                         </a:rPr>
                         <a:t>-0.074</a:t>
                       </a:r>
-                      <a:endParaRPr lang="en-US" sz="1250" dirty="0">
+                      <a:endParaRPr lang="en-US" sz="1150" dirty="0">
                         <a:latin typeface="Calibri" charset="0"/>
                         <a:ea typeface="Calibri" charset="0"/>
                         <a:cs typeface="Calibri" charset="0"/>
@@ -16086,8 +16291,6 @@
                     </a:solidFill>
                   </a:tcPr>
                 </a:tc>
-              </a:tr>
-              <a:tr h="329184">
                 <a:tc>
                   <a:txBody>
                     <a:bodyPr/>
@@ -16097,7 +16300,77 @@
                         <a:buNone/>
                       </a:pPr>
                       <a:r>
-                        <a:rPr lang="en-US" sz="1250" dirty="0">
+                        <a:rPr lang="en-US" sz="1150" dirty="0">
+                          <a:solidFill>
+                            <a:srgbClr val="0B2F3A"/>
+                          </a:solidFill>
+                          <a:latin typeface="Calibri" pitchFamily="34" charset="0"/>
+                          <a:ea typeface="Calibri" pitchFamily="34" charset="-122"/>
+                          <a:cs typeface="Calibri" pitchFamily="34" charset="-120"/>
+                        </a:rPr>
+                        <a:t>-0.035</a:t>
+                      </a:r>
+                      <a:endParaRPr lang="en-US" sz="1150" dirty="0">
+                        <a:latin typeface="Calibri" charset="0"/>
+                        <a:ea typeface="Calibri" charset="0"/>
+                        <a:cs typeface="Calibri" charset="0"/>
+                      </a:endParaRPr>
+                    </a:p>
+                  </a:txBody>
+                  <a:tcPr marL="91440" marR="91440" marT="45720" marB="45720" anchor="ctr">
+                    <a:lnL w="6350" cap="flat" cmpd="sng" algn="ctr">
+                      <a:solidFill>
+                        <a:srgbClr val="D5E2E6"/>
+                      </a:solidFill>
+                      <a:prstDash val="solid"/>
+                      <a:round/>
+                      <a:headEnd type="none" w="med" len="med"/>
+                      <a:tailEnd type="none" w="med" len="med"/>
+                    </a:lnL>
+                    <a:lnR w="6350" cap="flat" cmpd="sng" algn="ctr">
+                      <a:solidFill>
+                        <a:srgbClr val="D5E2E6"/>
+                      </a:solidFill>
+                      <a:prstDash val="solid"/>
+                      <a:round/>
+                      <a:headEnd type="none" w="med" len="med"/>
+                      <a:tailEnd type="none" w="med" len="med"/>
+                    </a:lnR>
+                    <a:lnT w="6350" cap="flat" cmpd="sng" algn="ctr">
+                      <a:solidFill>
+                        <a:srgbClr val="D5E2E6"/>
+                      </a:solidFill>
+                      <a:prstDash val="solid"/>
+                      <a:round/>
+                      <a:headEnd type="none" w="med" len="med"/>
+                      <a:tailEnd type="none" w="med" len="med"/>
+                    </a:lnT>
+                    <a:lnB w="6350" cap="flat" cmpd="sng" algn="ctr">
+                      <a:solidFill>
+                        <a:srgbClr val="D5E2E6"/>
+                      </a:solidFill>
+                      <a:prstDash val="solid"/>
+                      <a:round/>
+                      <a:headEnd type="none" w="med" len="med"/>
+                      <a:tailEnd type="none" w="med" len="med"/>
+                    </a:lnB>
+                    <a:solidFill>
+                      <a:srgbClr val="FFFFFF"/>
+                    </a:solidFill>
+                  </a:tcPr>
+                </a:tc>
+              </a:tr>
+              <a:tr h="301752">
+                <a:tc>
+                  <a:txBody>
+                    <a:bodyPr/>
+                    <a:lstStyle/>
+                    <a:p>
+                      <a:pPr algn="l" indent="0" marL="0">
+                        <a:buNone/>
+                      </a:pPr>
+                      <a:r>
+                        <a:rPr lang="en-US" sz="1150" dirty="0">
                           <a:solidFill>
                             <a:srgbClr val="0B2F3A"/>
                           </a:solidFill>
@@ -16107,7 +16380,7 @@
                         </a:rPr>
                         <a:t>Choquet RMSE (mmol/L)</a:t>
                       </a:r>
-                      <a:endParaRPr lang="en-US" sz="1250" dirty="0">
+                      <a:endParaRPr lang="en-US" sz="1150" dirty="0">
                         <a:latin typeface="Calibri" charset="0"/>
                         <a:ea typeface="Calibri" charset="0"/>
                         <a:cs typeface="Calibri" charset="0"/>
@@ -16165,7 +16438,7 @@
                         <a:buNone/>
                       </a:pPr>
                       <a:r>
-                        <a:rPr lang="en-US" sz="1250" dirty="0">
+                        <a:rPr lang="en-US" sz="1150" dirty="0">
                           <a:solidFill>
                             <a:srgbClr val="0B2F3A"/>
                           </a:solidFill>
@@ -16175,7 +16448,7 @@
                         </a:rPr>
                         <a:t>2.324</a:t>
                       </a:r>
-                      <a:endParaRPr lang="en-US" sz="1250" dirty="0">
+                      <a:endParaRPr lang="en-US" sz="1150" dirty="0">
                         <a:latin typeface="Calibri" charset="0"/>
                         <a:ea typeface="Calibri" charset="0"/>
                         <a:cs typeface="Calibri" charset="0"/>
@@ -16233,7 +16506,7 @@
                         <a:buNone/>
                       </a:pPr>
                       <a:r>
-                        <a:rPr lang="en-US" sz="1250" dirty="0">
+                        <a:rPr lang="en-US" sz="1150" dirty="0">
                           <a:solidFill>
                             <a:srgbClr val="0B2F3A"/>
                           </a:solidFill>
@@ -16243,7 +16516,7 @@
                         </a:rPr>
                         <a:t>2.786</a:t>
                       </a:r>
-                      <a:endParaRPr lang="en-US" sz="1250" dirty="0">
+                      <a:endParaRPr lang="en-US" sz="1150" dirty="0">
                         <a:latin typeface="Calibri" charset="0"/>
                         <a:ea typeface="Calibri" charset="0"/>
                         <a:cs typeface="Calibri" charset="0"/>
@@ -16292,8 +16565,6 @@
                     </a:solidFill>
                   </a:tcPr>
                 </a:tc>
-              </a:tr>
-              <a:tr h="329184">
                 <a:tc>
                   <a:txBody>
                     <a:bodyPr/>
@@ -16303,7 +16574,77 @@
                         <a:buNone/>
                       </a:pPr>
                       <a:r>
-                        <a:rPr lang="en-US" sz="1250" dirty="0">
+                        <a:rPr lang="en-US" sz="1150" dirty="0">
+                          <a:solidFill>
+                            <a:srgbClr val="0B2F3A"/>
+                          </a:solidFill>
+                          <a:latin typeface="Calibri" pitchFamily="34" charset="0"/>
+                          <a:ea typeface="Calibri" pitchFamily="34" charset="-122"/>
+                          <a:cs typeface="Calibri" pitchFamily="34" charset="-120"/>
+                        </a:rPr>
+                        <a:t>2.639</a:t>
+                      </a:r>
+                      <a:endParaRPr lang="en-US" sz="1150" dirty="0">
+                        <a:latin typeface="Calibri" charset="0"/>
+                        <a:ea typeface="Calibri" charset="0"/>
+                        <a:cs typeface="Calibri" charset="0"/>
+                      </a:endParaRPr>
+                    </a:p>
+                  </a:txBody>
+                  <a:tcPr marL="91440" marR="91440" marT="45720" marB="45720" anchor="ctr">
+                    <a:lnL w="6350" cap="flat" cmpd="sng" algn="ctr">
+                      <a:solidFill>
+                        <a:srgbClr val="D5E2E6"/>
+                      </a:solidFill>
+                      <a:prstDash val="solid"/>
+                      <a:round/>
+                      <a:headEnd type="none" w="med" len="med"/>
+                      <a:tailEnd type="none" w="med" len="med"/>
+                    </a:lnL>
+                    <a:lnR w="6350" cap="flat" cmpd="sng" algn="ctr">
+                      <a:solidFill>
+                        <a:srgbClr val="D5E2E6"/>
+                      </a:solidFill>
+                      <a:prstDash val="solid"/>
+                      <a:round/>
+                      <a:headEnd type="none" w="med" len="med"/>
+                      <a:tailEnd type="none" w="med" len="med"/>
+                    </a:lnR>
+                    <a:lnT w="6350" cap="flat" cmpd="sng" algn="ctr">
+                      <a:solidFill>
+                        <a:srgbClr val="D5E2E6"/>
+                      </a:solidFill>
+                      <a:prstDash val="solid"/>
+                      <a:round/>
+                      <a:headEnd type="none" w="med" len="med"/>
+                      <a:tailEnd type="none" w="med" len="med"/>
+                    </a:lnT>
+                    <a:lnB w="6350" cap="flat" cmpd="sng" algn="ctr">
+                      <a:solidFill>
+                        <a:srgbClr val="D5E2E6"/>
+                      </a:solidFill>
+                      <a:prstDash val="solid"/>
+                      <a:round/>
+                      <a:headEnd type="none" w="med" len="med"/>
+                      <a:tailEnd type="none" w="med" len="med"/>
+                    </a:lnB>
+                    <a:solidFill>
+                      <a:srgbClr val="EAF2F4"/>
+                    </a:solidFill>
+                  </a:tcPr>
+                </a:tc>
+              </a:tr>
+              <a:tr h="301752">
+                <a:tc>
+                  <a:txBody>
+                    <a:bodyPr/>
+                    <a:lstStyle/>
+                    <a:p>
+                      <a:pPr algn="l" indent="0" marL="0">
+                        <a:buNone/>
+                      </a:pPr>
+                      <a:r>
+                        <a:rPr lang="en-US" sz="1150" dirty="0">
                           <a:solidFill>
                             <a:srgbClr val="0B2F3A"/>
                           </a:solidFill>
@@ -16313,7 +16654,7 @@
                         </a:rPr>
                         <a:t>Baseline RMSE (mmol/L)</a:t>
                       </a:r>
-                      <a:endParaRPr lang="en-US" sz="1250" dirty="0">
+                      <a:endParaRPr lang="en-US" sz="1150" dirty="0">
                         <a:latin typeface="Calibri" charset="0"/>
                         <a:ea typeface="Calibri" charset="0"/>
                         <a:cs typeface="Calibri" charset="0"/>
@@ -16371,7 +16712,7 @@
                         <a:buNone/>
                       </a:pPr>
                       <a:r>
-                        <a:rPr lang="en-US" sz="1250" dirty="0">
+                        <a:rPr lang="en-US" sz="1150" dirty="0">
                           <a:solidFill>
                             <a:srgbClr val="0B2F3A"/>
                           </a:solidFill>
@@ -16381,7 +16722,7 @@
                         </a:rPr>
                         <a:t>2.520</a:t>
                       </a:r>
-                      <a:endParaRPr lang="en-US" sz="1250" dirty="0">
+                      <a:endParaRPr lang="en-US" sz="1150" dirty="0">
                         <a:latin typeface="Calibri" charset="0"/>
                         <a:ea typeface="Calibri" charset="0"/>
                         <a:cs typeface="Calibri" charset="0"/>
@@ -16439,7 +16780,7 @@
                         <a:buNone/>
                       </a:pPr>
                       <a:r>
-                        <a:rPr lang="en-US" sz="1250" dirty="0">
+                        <a:rPr lang="en-US" sz="1150" dirty="0">
                           <a:solidFill>
                             <a:srgbClr val="0B2F3A"/>
                           </a:solidFill>
@@ -16449,7 +16790,7 @@
                         </a:rPr>
                         <a:t>2.610</a:t>
                       </a:r>
-                      <a:endParaRPr lang="en-US" sz="1250" dirty="0">
+                      <a:endParaRPr lang="en-US" sz="1150" dirty="0">
                         <a:latin typeface="Calibri" charset="0"/>
                         <a:ea typeface="Calibri" charset="0"/>
                         <a:cs typeface="Calibri" charset="0"/>
@@ -16495,6 +16836,348 @@
                     </a:lnB>
                     <a:solidFill>
                       <a:srgbClr val="FFFFFF"/>
+                    </a:solidFill>
+                  </a:tcPr>
+                </a:tc>
+                <a:tc>
+                  <a:txBody>
+                    <a:bodyPr/>
+                    <a:lstStyle/>
+                    <a:p>
+                      <a:pPr algn="l" indent="0" marL="0">
+                        <a:buNone/>
+                      </a:pPr>
+                      <a:r>
+                        <a:rPr lang="en-US" sz="1150" dirty="0">
+                          <a:solidFill>
+                            <a:srgbClr val="0B2F3A"/>
+                          </a:solidFill>
+                          <a:latin typeface="Calibri" pitchFamily="34" charset="0"/>
+                          <a:ea typeface="Calibri" pitchFamily="34" charset="-122"/>
+                          <a:cs typeface="Calibri" pitchFamily="34" charset="-120"/>
+                        </a:rPr>
+                        <a:t>2.564</a:t>
+                      </a:r>
+                      <a:endParaRPr lang="en-US" sz="1150" dirty="0">
+                        <a:latin typeface="Calibri" charset="0"/>
+                        <a:ea typeface="Calibri" charset="0"/>
+                        <a:cs typeface="Calibri" charset="0"/>
+                      </a:endParaRPr>
+                    </a:p>
+                  </a:txBody>
+                  <a:tcPr marL="91440" marR="91440" marT="45720" marB="45720" anchor="ctr">
+                    <a:lnL w="6350" cap="flat" cmpd="sng" algn="ctr">
+                      <a:solidFill>
+                        <a:srgbClr val="D5E2E6"/>
+                      </a:solidFill>
+                      <a:prstDash val="solid"/>
+                      <a:round/>
+                      <a:headEnd type="none" w="med" len="med"/>
+                      <a:tailEnd type="none" w="med" len="med"/>
+                    </a:lnL>
+                    <a:lnR w="6350" cap="flat" cmpd="sng" algn="ctr">
+                      <a:solidFill>
+                        <a:srgbClr val="D5E2E6"/>
+                      </a:solidFill>
+                      <a:prstDash val="solid"/>
+                      <a:round/>
+                      <a:headEnd type="none" w="med" len="med"/>
+                      <a:tailEnd type="none" w="med" len="med"/>
+                    </a:lnR>
+                    <a:lnT w="6350" cap="flat" cmpd="sng" algn="ctr">
+                      <a:solidFill>
+                        <a:srgbClr val="D5E2E6"/>
+                      </a:solidFill>
+                      <a:prstDash val="solid"/>
+                      <a:round/>
+                      <a:headEnd type="none" w="med" len="med"/>
+                      <a:tailEnd type="none" w="med" len="med"/>
+                    </a:lnT>
+                    <a:lnB w="6350" cap="flat" cmpd="sng" algn="ctr">
+                      <a:solidFill>
+                        <a:srgbClr val="D5E2E6"/>
+                      </a:solidFill>
+                      <a:prstDash val="solid"/>
+                      <a:round/>
+                      <a:headEnd type="none" w="med" len="med"/>
+                      <a:tailEnd type="none" w="med" len="med"/>
+                    </a:lnB>
+                    <a:solidFill>
+                      <a:srgbClr val="FFFFFF"/>
+                    </a:solidFill>
+                  </a:tcPr>
+                </a:tc>
+              </a:tr>
+              <a:tr h="301752">
+                <a:tc>
+                  <a:txBody>
+                    <a:bodyPr/>
+                    <a:lstStyle/>
+                    <a:p>
+                      <a:pPr algn="l" indent="0" marL="0">
+                        <a:buNone/>
+                      </a:pPr>
+                      <a:r>
+                        <a:rPr lang="en-US" sz="1150" dirty="0">
+                          <a:solidFill>
+                            <a:srgbClr val="0B2F3A"/>
+                          </a:solidFill>
+                          <a:latin typeface="Calibri" pitchFamily="34" charset="0"/>
+                          <a:ea typeface="Calibri" pitchFamily="34" charset="-122"/>
+                          <a:cs typeface="Calibri" pitchFamily="34" charset="-120"/>
+                        </a:rPr>
+                        <a:t>Beats the baseline?</a:t>
+                      </a:r>
+                      <a:endParaRPr lang="en-US" sz="1150" dirty="0">
+                        <a:latin typeface="Calibri" charset="0"/>
+                        <a:ea typeface="Calibri" charset="0"/>
+                        <a:cs typeface="Calibri" charset="0"/>
+                      </a:endParaRPr>
+                    </a:p>
+                  </a:txBody>
+                  <a:tcPr marL="91440" marR="91440" marT="45720" marB="45720" anchor="ctr">
+                    <a:lnL w="6350" cap="flat" cmpd="sng" algn="ctr">
+                      <a:solidFill>
+                        <a:srgbClr val="D5E2E6"/>
+                      </a:solidFill>
+                      <a:prstDash val="solid"/>
+                      <a:round/>
+                      <a:headEnd type="none" w="med" len="med"/>
+                      <a:tailEnd type="none" w="med" len="med"/>
+                    </a:lnL>
+                    <a:lnR w="6350" cap="flat" cmpd="sng" algn="ctr">
+                      <a:solidFill>
+                        <a:srgbClr val="D5E2E6"/>
+                      </a:solidFill>
+                      <a:prstDash val="solid"/>
+                      <a:round/>
+                      <a:headEnd type="none" w="med" len="med"/>
+                      <a:tailEnd type="none" w="med" len="med"/>
+                    </a:lnR>
+                    <a:lnT w="6350" cap="flat" cmpd="sng" algn="ctr">
+                      <a:solidFill>
+                        <a:srgbClr val="D5E2E6"/>
+                      </a:solidFill>
+                      <a:prstDash val="solid"/>
+                      <a:round/>
+                      <a:headEnd type="none" w="med" len="med"/>
+                      <a:tailEnd type="none" w="med" len="med"/>
+                    </a:lnT>
+                    <a:lnB w="6350" cap="flat" cmpd="sng" algn="ctr">
+                      <a:solidFill>
+                        <a:srgbClr val="D5E2E6"/>
+                      </a:solidFill>
+                      <a:prstDash val="solid"/>
+                      <a:round/>
+                      <a:headEnd type="none" w="med" len="med"/>
+                      <a:tailEnd type="none" w="med" len="med"/>
+                    </a:lnB>
+                    <a:solidFill>
+                      <a:srgbClr val="EAF2F4"/>
+                    </a:solidFill>
+                  </a:tcPr>
+                </a:tc>
+                <a:tc>
+                  <a:txBody>
+                    <a:bodyPr/>
+                    <a:lstStyle/>
+                    <a:p>
+                      <a:pPr algn="l" indent="0" marL="0">
+                        <a:buNone/>
+                      </a:pPr>
+                      <a:r>
+                        <a:rPr lang="en-US" sz="1150" dirty="0">
+                          <a:solidFill>
+                            <a:srgbClr val="0B2F3A"/>
+                          </a:solidFill>
+                          <a:latin typeface="Calibri" pitchFamily="34" charset="0"/>
+                          <a:ea typeface="Calibri" pitchFamily="34" charset="-122"/>
+                          <a:cs typeface="Calibri" pitchFamily="34" charset="-120"/>
+                        </a:rPr>
+                        <a:t>YES</a:t>
+                      </a:r>
+                      <a:endParaRPr lang="en-US" sz="1150" dirty="0">
+                        <a:latin typeface="Calibri" charset="0"/>
+                        <a:ea typeface="Calibri" charset="0"/>
+                        <a:cs typeface="Calibri" charset="0"/>
+                      </a:endParaRPr>
+                    </a:p>
+                  </a:txBody>
+                  <a:tcPr marL="91440" marR="91440" marT="45720" marB="45720" anchor="ctr">
+                    <a:lnL w="6350" cap="flat" cmpd="sng" algn="ctr">
+                      <a:solidFill>
+                        <a:srgbClr val="D5E2E6"/>
+                      </a:solidFill>
+                      <a:prstDash val="solid"/>
+                      <a:round/>
+                      <a:headEnd type="none" w="med" len="med"/>
+                      <a:tailEnd type="none" w="med" len="med"/>
+                    </a:lnL>
+                    <a:lnR w="6350" cap="flat" cmpd="sng" algn="ctr">
+                      <a:solidFill>
+                        <a:srgbClr val="D5E2E6"/>
+                      </a:solidFill>
+                      <a:prstDash val="solid"/>
+                      <a:round/>
+                      <a:headEnd type="none" w="med" len="med"/>
+                      <a:tailEnd type="none" w="med" len="med"/>
+                    </a:lnR>
+                    <a:lnT w="6350" cap="flat" cmpd="sng" algn="ctr">
+                      <a:solidFill>
+                        <a:srgbClr val="D5E2E6"/>
+                      </a:solidFill>
+                      <a:prstDash val="solid"/>
+                      <a:round/>
+                      <a:headEnd type="none" w="med" len="med"/>
+                      <a:tailEnd type="none" w="med" len="med"/>
+                    </a:lnT>
+                    <a:lnB w="6350" cap="flat" cmpd="sng" algn="ctr">
+                      <a:solidFill>
+                        <a:srgbClr val="D5E2E6"/>
+                      </a:solidFill>
+                      <a:prstDash val="solid"/>
+                      <a:round/>
+                      <a:headEnd type="none" w="med" len="med"/>
+                      <a:tailEnd type="none" w="med" len="med"/>
+                    </a:lnB>
+                    <a:solidFill>
+                      <a:srgbClr val="EAF2F4"/>
+                    </a:solidFill>
+                  </a:tcPr>
+                </a:tc>
+                <a:tc>
+                  <a:txBody>
+                    <a:bodyPr/>
+                    <a:lstStyle/>
+                    <a:p>
+                      <a:pPr algn="l" indent="0" marL="0">
+                        <a:buNone/>
+                      </a:pPr>
+                      <a:r>
+                        <a:rPr lang="en-US" sz="1150" dirty="0">
+                          <a:solidFill>
+                            <a:srgbClr val="0B2F3A"/>
+                          </a:solidFill>
+                          <a:latin typeface="Calibri" pitchFamily="34" charset="0"/>
+                          <a:ea typeface="Calibri" pitchFamily="34" charset="-122"/>
+                          <a:cs typeface="Calibri" pitchFamily="34" charset="-120"/>
+                        </a:rPr>
+                        <a:t>no</a:t>
+                      </a:r>
+                      <a:endParaRPr lang="en-US" sz="1150" dirty="0">
+                        <a:latin typeface="Calibri" charset="0"/>
+                        <a:ea typeface="Calibri" charset="0"/>
+                        <a:cs typeface="Calibri" charset="0"/>
+                      </a:endParaRPr>
+                    </a:p>
+                  </a:txBody>
+                  <a:tcPr marL="91440" marR="91440" marT="45720" marB="45720" anchor="ctr">
+                    <a:lnL w="6350" cap="flat" cmpd="sng" algn="ctr">
+                      <a:solidFill>
+                        <a:srgbClr val="D5E2E6"/>
+                      </a:solidFill>
+                      <a:prstDash val="solid"/>
+                      <a:round/>
+                      <a:headEnd type="none" w="med" len="med"/>
+                      <a:tailEnd type="none" w="med" len="med"/>
+                    </a:lnL>
+                    <a:lnR w="6350" cap="flat" cmpd="sng" algn="ctr">
+                      <a:solidFill>
+                        <a:srgbClr val="D5E2E6"/>
+                      </a:solidFill>
+                      <a:prstDash val="solid"/>
+                      <a:round/>
+                      <a:headEnd type="none" w="med" len="med"/>
+                      <a:tailEnd type="none" w="med" len="med"/>
+                    </a:lnR>
+                    <a:lnT w="6350" cap="flat" cmpd="sng" algn="ctr">
+                      <a:solidFill>
+                        <a:srgbClr val="D5E2E6"/>
+                      </a:solidFill>
+                      <a:prstDash val="solid"/>
+                      <a:round/>
+                      <a:headEnd type="none" w="med" len="med"/>
+                      <a:tailEnd type="none" w="med" len="med"/>
+                    </a:lnT>
+                    <a:lnB w="6350" cap="flat" cmpd="sng" algn="ctr">
+                      <a:solidFill>
+                        <a:srgbClr val="D5E2E6"/>
+                      </a:solidFill>
+                      <a:prstDash val="solid"/>
+                      <a:round/>
+                      <a:headEnd type="none" w="med" len="med"/>
+                      <a:tailEnd type="none" w="med" len="med"/>
+                    </a:lnB>
+                    <a:solidFill>
+                      <a:srgbClr val="EAF2F4"/>
+                    </a:solidFill>
+                  </a:tcPr>
+                </a:tc>
+                <a:tc>
+                  <a:txBody>
+                    <a:bodyPr/>
+                    <a:lstStyle/>
+                    <a:p>
+                      <a:pPr algn="l" indent="0" marL="0">
+                        <a:buNone/>
+                      </a:pPr>
+                      <a:r>
+                        <a:rPr lang="en-US" sz="1150" dirty="0">
+                          <a:solidFill>
+                            <a:srgbClr val="0B2F3A"/>
+                          </a:solidFill>
+                          <a:latin typeface="Calibri" pitchFamily="34" charset="0"/>
+                          <a:ea typeface="Calibri" pitchFamily="34" charset="-122"/>
+                          <a:cs typeface="Calibri" pitchFamily="34" charset="-120"/>
+                        </a:rPr>
+                        <a:t>no</a:t>
+                      </a:r>
+                      <a:endParaRPr lang="en-US" sz="1150" dirty="0">
+                        <a:latin typeface="Calibri" charset="0"/>
+                        <a:ea typeface="Calibri" charset="0"/>
+                        <a:cs typeface="Calibri" charset="0"/>
+                      </a:endParaRPr>
+                    </a:p>
+                  </a:txBody>
+                  <a:tcPr marL="91440" marR="91440" marT="45720" marB="45720" anchor="ctr">
+                    <a:lnL w="6350" cap="flat" cmpd="sng" algn="ctr">
+                      <a:solidFill>
+                        <a:srgbClr val="D5E2E6"/>
+                      </a:solidFill>
+                      <a:prstDash val="solid"/>
+                      <a:round/>
+                      <a:headEnd type="none" w="med" len="med"/>
+                      <a:tailEnd type="none" w="med" len="med"/>
+                    </a:lnL>
+                    <a:lnR w="6350" cap="flat" cmpd="sng" algn="ctr">
+                      <a:solidFill>
+                        <a:srgbClr val="D5E2E6"/>
+                      </a:solidFill>
+                      <a:prstDash val="solid"/>
+                      <a:round/>
+                      <a:headEnd type="none" w="med" len="med"/>
+                      <a:tailEnd type="none" w="med" len="med"/>
+                    </a:lnR>
+                    <a:lnT w="6350" cap="flat" cmpd="sng" algn="ctr">
+                      <a:solidFill>
+                        <a:srgbClr val="D5E2E6"/>
+                      </a:solidFill>
+                      <a:prstDash val="solid"/>
+                      <a:round/>
+                      <a:headEnd type="none" w="med" len="med"/>
+                      <a:tailEnd type="none" w="med" len="med"/>
+                    </a:lnT>
+                    <a:lnB w="6350" cap="flat" cmpd="sng" algn="ctr">
+                      <a:solidFill>
+                        <a:srgbClr val="D5E2E6"/>
+                      </a:solidFill>
+                      <a:prstDash val="solid"/>
+                      <a:round/>
+                      <a:headEnd type="none" w="med" len="med"/>
+                      <a:tailEnd type="none" w="med" len="med"/>
+                    </a:lnB>
+                    <a:solidFill>
+                      <a:srgbClr val="EAF2F4"/>
                     </a:solidFill>
                   </a:tcPr>
                 </a:tc>
@@ -16804,8 +17487,8 @@
         </p:nvSpPr>
         <p:spPr>
           <a:xfrm>
-            <a:off x="822960" y="4892040"/>
-            <a:ext cx="6400800" cy="548640"/>
+            <a:off x="822960" y="4846320"/>
+            <a:ext cx="6400800" cy="640080"/>
           </a:xfrm>
           <a:prstGeom prst="rect">
             <a:avLst/>
@@ -16821,7 +17504,7 @@
               <a:buNone/>
             </a:pPr>
             <a:r>
-              <a:rPr lang="en-US" sz="1250" dirty="0">
+              <a:rPr lang="en-US" sz="1200" dirty="0">
                 <a:solidFill>
                   <a:srgbClr val="D6E6EA"/>
                 </a:solidFill>
@@ -16829,9 +17512,9 @@
                 <a:ea typeface="Calibri" pitchFamily="34" charset="-122"/>
                 <a:cs typeface="Calibri" pitchFamily="34" charset="-120"/>
               </a:rPr>
-              <a:t>This independently replicates the 2026 finding above - on a different signal (ECG), a different dataset, and a different model class (fuzzy-integral fusion, not CNNs).</a:t>
-            </a:r>
-            <a:endParaRPr lang="en-US" sz="1250" dirty="0"/>
+              <a:t>Note leave-one-out is not worse than subject-aware: it trains on 9 of 10 patients rather than 4 of 5, so it has more data. The invariant is that BOTH honest splits put every method behind the baseline.</a:t>
+            </a:r>
+            <a:endParaRPr lang="en-US" sz="1200" dirty="0"/>
           </a:p>
         </p:txBody>
       </p:sp>

--- a/BTP_presentation.pptx
+++ b/BTP_presentation.pptx
@@ -516,10 +516,8 @@
           <a:lstStyle/>
           <a:p>
             <a:r>
-              <a:rPr lang="en-US" dirty="0"/>
-              <a:t>We reproduce a 2024 IEEE method on open data. The headline is not the accuracy - it is four ways this kind of pipeline produces confident wrong answers.</a:t>
-            </a:r>
-            <a:endParaRPr lang="en-US" dirty="0"/>
+              <a:t>30s. Do NOT give the conclusion yet - slides 2-5 set up the problem.</a:t>
+            </a:r>
           </a:p>
         </p:txBody>
       </p:sp>
@@ -604,10 +602,8 @@
           <a:lstStyle/>
           <a:p>
             <a:r>
-              <a:rPr lang="en-US" dirty="0"/>
-              <a:t/>
-            </a:r>
-            <a:endParaRPr lang="en-US" dirty="0"/>
+              <a:t>75s. Point at the LAST row. The baseline predicts a constant, explains zero variance, and has BOTH the best R-squared (-0.074) and the best clinical score (90.0%). Why: most readings sit in a narrow band, so a constant already lands in A and B. The grid catches DANGEROUS errors, not USELESS ones. Rule: never report a zone score without a baseline beside it.</a:t>
+            </a:r>
           </a:p>
         </p:txBody>
       </p:sp>
@@ -692,10 +688,8 @@
           <a:lstStyle/>
           <a:p>
             <a:r>
-              <a:rPr lang="en-US" dirty="0"/>
-              <a:t>If you only have time for one point about evaluation, make it this one: never report a clinical zone score without the baseline beside it.</a:t>
-            </a:r>
-            <a:endParaRPr lang="en-US" dirty="0"/>
+              <a:t>45s, quick and visual. Red bar = the constant predictor. LONGEST on the left (best clinical score), SHORTEST on the right (least-bad R-squared). One metric says it wins, the other says nothing works. If you only report the left chart, you would ship this.</a:t>
+            </a:r>
           </a:p>
         </p:txBody>
       </p:sp>
@@ -780,10 +774,8 @@
           <a:lstStyle/>
           <a:p>
             <a:r>
-              <a:rPr lang="en-US" dirty="0"/>
-              <a:t/>
-            </a:r>
-            <a:endParaRPr lang="en-US" dirty="0"/>
+              <a:t>90s. Start with the two clues: weighted average = plain average byte-identical (impossible if weights differ), and every density at exactly the 0.01 floor. Then the theorem: equal densities make the measure symmetric, so the integral becomes a fixed function of RANK. Weak models -&gt; lambda &gt; 0 -&gt; beta &gt; 1 -&gt; weight grows toward the SMALLEST. At g=0.01 that is 89.5% on the minimum. Confirmation: corr 0.998 with min(). DO NOT SKIP the dark box - it is not only a bug, it fires exactly when the models cannot generalise.</a:t>
+            </a:r>
           </a:p>
         </p:txBody>
       </p:sp>
@@ -868,10 +860,8 @@
           <a:lstStyle/>
           <a:p>
             <a:r>
-              <a:rPr lang="en-US" dirty="0"/>
-              <a:t/>
-            </a:r>
-            <a:endParaRPr lang="en-US" dirty="0"/>
+              <a:t>60s. CUT IF SHORT - the result is already on slide 12. Three substitutions: apply Sugeno j times, subtract consecutive terms, check the geometric series sums to 1. The red box is the point: weak models force beta &gt; 1, which piles weight on the smallest prediction.</a:t>
+            </a:r>
           </a:p>
         </p:txBody>
       </p:sp>
@@ -956,10 +946,8 @@
           <a:lstStyle/>
           <a:p>
             <a:r>
-              <a:rPr lang="en-US" dirty="0"/>
-              <a:t/>
-            </a:r>
-            <a:endParaRPr lang="en-US" dirty="0"/>
+              <a:t>60s. RANSAC = random sample consensus, unseeded, so identical input gives different output - 5 distinct values in 30 calls. Up to 72% of correlation-dimension values changed. POINT AT THE SECOND NUMBER: 177 other features bit-identical - that is the control proving it was the slope fit, not anything else we changed. Found only because we tested determinism, which almost nobody does.</a:t>
+            </a:r>
           </a:p>
         </p:txBody>
       </p:sp>
@@ -1044,10 +1032,8 @@
           <a:lstStyle/>
           <a:p>
             <a:r>
-              <a:rPr lang="en-US" dirty="0"/>
-              <a:t/>
-            </a:r>
-            <a:endParaRPr lang="en-US" dirty="0"/>
+              <a:t>90s. Four contributions, then the amber box. Say the limits CONFIDENTLY, not apologetically: cannot claim the method never works, only that it does not here under honest evaluation and that its fusion was inactive. Stating limitations is the point of a reproduction, not a weakness.</a:t>
+            </a:r>
           </a:p>
         </p:txBody>
       </p:sp>
@@ -1132,10 +1118,8 @@
           <a:lstStyle/>
           <a:p>
             <a:r>
-              <a:rPr lang="en-US" dirty="0"/>
-              <a:t/>
-            </a:r>
-            <a:endParaRPr lang="en-US" dirty="0"/>
+              <a:t>15s. 'Full write-up with every derivation is in the repository.' Then STOP TALKING. Leave this up, or go back to slide 15 for questions.</a:t>
+            </a:r>
           </a:p>
         </p:txBody>
       </p:sp>
@@ -1220,10 +1204,8 @@
           <a:lstStyle/>
           <a:p>
             <a:r>
-              <a:rPr lang="en-US" dirty="0"/>
-              <a:t>Open here. The audience needs to know what glucose is, why it matters, and that there IS a real reason to look at the heart - before any maths.</a:t>
-            </a:r>
-            <a:endParaRPr lang="en-US" dirty="0"/>
+              <a:t>90s. Three beats: (1) what glucose is and why both directions are dangerous, (2) today it means breaking skin, 590M adults, (3) the amber box - the biology supports DETECTING an event, not reading the exact number. Classification vs regression. This project attempted the number.</a:t>
+            </a:r>
           </a:p>
         </p:txBody>
       </p:sp>
@@ -1308,10 +1290,8 @@
           <a:lstStyle/>
           <a:p>
             <a:r>
-              <a:rPr lang="en-US" dirty="0"/>
-              <a:t/>
-            </a:r>
-            <a:endParaRPr lang="en-US" dirty="0"/>
+              <a:t>90s. IEEE TNNLS, a serious journal. 1.49 mmol/L approaches approved CGM accuracy. They published code but NOT data - so nobody had independently checked it. That is what a reproduction is for. Walk the three stage boxes left to right.</a:t>
+            </a:r>
           </a:p>
         </p:txBody>
       </p:sp>
@@ -1396,10 +1376,8 @@
           <a:lstStyle/>
           <a:p>
             <a:r>
-              <a:rPr lang="en-US" dirty="0"/>
-              <a:t>193 features = 80 ECG wavelet + 80 PPG wavelet + 33 morphological (QT, QTc, ST level, T-wave shape, HRV, PPG pulse shape).</a:t>
-            </a:r>
-            <a:endParaRPr lang="en-US" dirty="0"/>
+              <a:t>90s. SLOW DOWN on the dark box. 2.519 is the standard deviation of glucose, and therefore the error of a model that always guesses the average. It is the score for learning NOTHING. Most papers never report it; we report it beside every result. Everything after this slide depends on them having this.</a:t>
+            </a:r>
           </a:p>
         </p:txBody>
       </p:sp>
@@ -1484,10 +1462,8 @@
           <a:lstStyle/>
           <a:p>
             <a:r>
-              <a:rPr lang="en-US" dirty="0"/>
-              <a:t>Do not rush this slide. The key intuition: a weighted average cannot express that two models overlap. The Choquet integral can, because it scores every subset.</a:t>
-            </a:r>
-            <a:endParaRPr lang="en-US" dirty="0"/>
+              <a:t>2 min, densest slide. START WITH THE ANALOGY at bottom left - three doctors, two trained together so averaging double-counts, one is more experienced. A weighted average handles the second but NOT the first. THEN the formulas. Note the weights (.300,.342,.358) are not the densities (.30,.25,.20) - that gap is the integral doing something a weighted average cannot.</a:t>
+            </a:r>
           </a:p>
         </p:txBody>
       </p:sp>
@@ -1572,10 +1548,8 @@
           <a:lstStyle/>
           <a:p>
             <a:r>
-              <a:rPr lang="en-US" dirty="0"/>
-              <a:t>If asked why a wavelet: measuring 'irregularity' means something different for the fast QRS than for the slow T wave. Separating them lets each be described on its own terms.</a:t>
-            </a:r>
-            <a:endParaRPr lang="en-US" dirty="0"/>
+              <a:t>60s. CUT THIS FIRST if short on time. Key line: a heartbeat mixes fast (QRS, 0.1s) and slow (T wave, 0.3s) things, so measuring the whole window blends them; the wavelet separates them into 8 layers. Then 8 x 10 = 80 per signal. Mention QTc median 0.405s vs textbook 0.35-0.44 as validation.</a:t>
+            </a:r>
           </a:p>
         </p:txBody>
       </p:sp>
@@ -1660,10 +1634,8 @@
           <a:lstStyle/>
           <a:p>
             <a:r>
-              <a:rPr lang="en-US" dirty="0"/>
-              <a:t/>
-            </a:r>
-            <a:endParaRPr lang="en-US" dirty="0"/>
+              <a:t>90s. THE most important concept in the talk. Walk the three boxes. Then the key insight, said slowly: consecutive windows from one person are very similar, so a random split lets the model recognise the PERSON and recall their typical glucose. That is not learning about glucose - but it scores beautifully. Close with the 2026 study: 0.60 under random, -0.08 under participant-aware.</a:t>
+            </a:r>
           </a:p>
         </p:txBody>
       </p:sp>
@@ -1748,10 +1720,8 @@
           <a:lstStyle/>
           <a:p>
             <a:r>
-              <a:rPr lang="en-US" dirty="0"/>
-              <a:t/>
-            </a:r>
-            <a:endParaRPr lang="en-US" dirty="0"/>
+              <a:t>90s. DEFINE R-SQUARED FIRST - 1 perfect, 0 = same as guessing the average, NEGATIVE = worse than guessing. Then: +0.149 random, -0.223 subject-aware, -0.097 leave-one-out. Same data, same code, only the split changed. RAISE THE ORDERING YOURSELF: LOSO is better than subject-aware because it trains on 9 of 10 rather than 4 of 5. Saying it first is far stronger than being caught.</a:t>
+            </a:r>
           </a:p>
         </p:txBody>
       </p:sp>
@@ -1836,10 +1806,8 @@
           <a:lstStyle/>
           <a:p>
             <a:r>
-              <a:rPr lang="en-US" dirty="0"/>
-              <a:t>This is the single most convincing slide. Point at the horizontal band. A model that had learned anything would slope upward along the diagonal.</a:t>
-            </a:r>
-            <a:endParaRPr lang="en-US" dirty="0"/>
+              <a:t>90s. YOUR BEST SLIDE. Trace the diagonal with your hand - that is what a working model looks like. Then trace the horizontal band - whether the truth was 4 or 20, it predicts 6-9. That is what 'no better than the average' looks like drawn. THEN the sting: that same flat band scores 89.4% Zone A+B. PAUSE. Let it land.</a:t>
+            </a:r>
           </a:p>
         </p:txBody>
       </p:sp>

--- a/BTP_presentation.pptx
+++ b/BTP_presentation.pptx
@@ -21,9 +21,10 @@
     <p:sldId id="269" r:id="rId15"/>
     <p:sldId id="270" r:id="rId16"/>
     <p:sldId id="271" r:id="rId17"/>
+    <p:sldId id="272" r:id="rId18"/>
   </p:sldIdLst>
   <p:notesMasterIdLst>
-    <p:notesMasterId r:id="rId18"/>
+    <p:notesMasterId r:id="rId19"/>
   </p:notesMasterIdLst>
   <p:sldSz cx="12192000" cy="6858000"/>
   <p:notesSz cx="6858000" cy="12192000"/>
@@ -860,7 +861,7 @@
           <a:lstStyle/>
           <a:p>
             <a:r>
-              <a:t>60s. CUT IF SHORT - the result is already on slide 12. Three substitutions: apply Sugeno j times, subtract consecutive terms, check the geometric series sums to 1. The red box is the point: weak models force beta &gt; 1, which piles weight on the smallest prediction.</a:t>
+              <a:t>60s. Two points. LEFT: every bar is past the dashed baseline - no subset of the 193 features recovers glucose. And the ordering runs the WRONG WAY: fewer features score better, which is what fitting noise looks like. RIGHT: the worst models by R-squared carry the HIGHEST clinical score. Not weak - inverted. A model predicting a narrow band near the average is never dangerous, just useless - and the grid only catches danger.</a:t>
             </a:r>
           </a:p>
         </p:txBody>
@@ -946,7 +947,7 @@
           <a:lstStyle/>
           <a:p>
             <a:r>
-              <a:t>60s. RANSAC = random sample consensus, unseeded, so identical input gives different output - 5 distinct values in 30 calls. Up to 72% of correlation-dimension values changed. POINT AT THE SECOND NUMBER: 177 other features bit-identical - that is the control proving it was the slope fit, not anything else we changed. Found only because we tested determinism, which almost nobody does.</a:t>
+              <a:t>60s. CUT IF SHORT - the result is already on slide 12. Three substitutions: apply Sugeno j times, subtract consecutive terms, check the geometric series sums to 1. The red box is the point: weak models force beta &gt; 1, which piles weight on the smallest prediction.</a:t>
             </a:r>
           </a:p>
         </p:txBody>
@@ -1032,7 +1033,7 @@
           <a:lstStyle/>
           <a:p>
             <a:r>
-              <a:t>90s. Four contributions, then the amber box. Say the limits CONFIDENTLY, not apologetically: cannot claim the method never works, only that it does not here under honest evaluation and that its fusion was inactive. Stating limitations is the point of a reproduction, not a weakness.</a:t>
+              <a:t>60s. RANSAC = random sample consensus, unseeded, so identical input gives different output - 5 distinct values in 30 calls. Up to 72% of correlation-dimension values changed. POINT AT THE SECOND NUMBER: 177 other features bit-identical - that is the control proving it was the slope fit, not anything else we changed. Found only because we tested determinism, which almost nobody does.</a:t>
             </a:r>
           </a:p>
         </p:txBody>
@@ -1118,7 +1119,7 @@
           <a:lstStyle/>
           <a:p>
             <a:r>
-              <a:t>15s. 'Full write-up with every derivation is in the repository.' Then STOP TALKING. Leave this up, or go back to slide 15 for questions.</a:t>
+              <a:t>90s. Four contributions, then the amber box. Say the limits CONFIDENTLY, not apologetically: cannot claim the method never works, only that it does not here under honest evaluation and that its fusion was inactive. Stating limitations is the point of a reproduction, not a weakness.</a:t>
             </a:r>
           </a:p>
         </p:txBody>
@@ -1141,6 +1142,92 @@
             <a:fld id="{F7021451-1387-4CA6-816F-3879F97B5CBC}" type="slidenum">
               <a:rPr lang="en-US"/>
               <a:t>16</a:t>
+            </a:fld>
+            <a:endParaRPr lang="en-US"/>
+          </a:p>
+        </p:txBody>
+      </p:sp>
+    </p:spTree>
+    <p:extLst>
+      <p:ext uri="{BB962C8B-B14F-4D97-AF65-F5344CB8AC3E}">
+        <p14:creationId xmlns:p14="http://schemas.microsoft.com/office/powerpoint/2010/main" val="1024086991"/>
+      </p:ext>
+    </p:extLst>
+  </p:cSld>
+  <p:clrMapOvr>
+    <a:masterClrMapping/>
+  </p:clrMapOvr>
+</p:notes>
+</file>
+
+<file path=ppt/notesSlides/notesSlide17.xml><?xml version="1.0" encoding="utf-8"?>
+<p:notes xmlns:a="http://schemas.openxmlformats.org/drawingml/2006/main" xmlns:r="http://schemas.openxmlformats.org/officeDocument/2006/relationships" xmlns:p="http://schemas.openxmlformats.org/presentationml/2006/main">
+  <p:cSld>
+    <p:spTree>
+      <p:nvGrpSpPr>
+        <p:cNvPr id="1" name=""/>
+        <p:cNvGrpSpPr/>
+        <p:nvPr/>
+      </p:nvGrpSpPr>
+      <p:grpSpPr>
+        <a:xfrm>
+          <a:off x="0" y="0"/>
+          <a:ext cx="0" cy="0"/>
+          <a:chOff x="0" y="0"/>
+          <a:chExt cx="0" cy="0"/>
+        </a:xfrm>
+      </p:grpSpPr>
+      <p:sp>
+        <p:nvSpPr>
+          <p:cNvPr id="2" name="Slide Image Placeholder 1"/>
+          <p:cNvSpPr>
+            <a:spLocks noGrp="1" noRot="1" noChangeAspect="1"/>
+          </p:cNvSpPr>
+          <p:nvPr>
+            <p:ph type="sldImg"/>
+          </p:nvPr>
+        </p:nvSpPr>
+        <p:spPr/>
+      </p:sp>
+      <p:sp>
+        <p:nvSpPr>
+          <p:cNvPr id="3" name="Notes Placeholder 2"/>
+          <p:cNvSpPr>
+            <a:spLocks noGrp="1"/>
+          </p:cNvSpPr>
+          <p:nvPr>
+            <p:ph type="body" idx="1"/>
+          </p:nvPr>
+        </p:nvSpPr>
+        <p:spPr/>
+        <p:txBody>
+          <a:bodyPr/>
+          <a:lstStyle/>
+          <a:p>
+            <a:r>
+              <a:t>15s. 'Full write-up with every derivation is in the repository.' Then STOP TALKING. Leave this up, or go back to slide 15 for questions.</a:t>
+            </a:r>
+          </a:p>
+        </p:txBody>
+      </p:sp>
+      <p:sp>
+        <p:nvSpPr>
+          <p:cNvPr id="4" name="Slide Number Placeholder 3"/>
+          <p:cNvSpPr>
+            <a:spLocks noGrp="1"/>
+          </p:cNvSpPr>
+          <p:nvPr>
+            <p:ph type="sldNum" sz="quarter" idx="10"/>
+          </p:nvPr>
+        </p:nvSpPr>
+        <p:spPr/>
+        <p:txBody>
+          <a:bodyPr/>
+          <a:lstStyle/>
+          <a:p>
+            <a:fld id="{F7021451-1387-4CA6-816F-3879F97B5CBC}" type="slidenum">
+              <a:rPr lang="en-US"/>
+              <a:t>17</a:t>
             </a:fld>
             <a:endParaRPr lang="en-US"/>
           </a:p>
@@ -7535,7 +7622,312 @@
                 <a:ea typeface="Cambria" pitchFamily="34" charset="-122"/>
                 <a:cs typeface="Cambria" pitchFamily="34" charset="-120"/>
               </a:rPr>
-              <a:t>Finding 4: a standard feature library returns different answers for identical input</a:t>
+              <a:t>Finding 4: no feature set works - and fewer features work better</a:t>
+            </a:r>
+            <a:endParaRPr lang="en-US" sz="2700" dirty="0"/>
+          </a:p>
+        </p:txBody>
+      </p:sp>
+      <p:pic>
+        <p:nvPicPr>
+          <p:cNvPr id="3" name="Image 0" descr="figures/results/fig_ablation.png">    </p:cNvPr>
+          <p:cNvPicPr>
+            <a:picLocks noChangeAspect="1"/>
+          </p:cNvPicPr>
+          <p:nvPr/>
+        </p:nvPicPr>
+        <p:blipFill>
+          <a:blip r:embed="rId1"/>
+          <a:stretch>
+            <a:fillRect/>
+          </a:stretch>
+        </p:blipFill>
+        <p:spPr>
+          <a:xfrm>
+            <a:off x="548640" y="1280160"/>
+            <a:ext cx="11064240" cy="3383280"/>
+          </a:xfrm>
+          <a:prstGeom prst="rect">
+            <a:avLst/>
+          </a:prstGeom>
+        </p:spPr>
+      </p:pic>
+      <p:sp>
+        <p:nvSpPr>
+          <p:cNvPr id="4" name="Shape 1"/>
+          <p:cNvSpPr/>
+          <p:nvPr/>
+        </p:nvSpPr>
+        <p:spPr>
+          <a:xfrm>
+            <a:off x="548640" y="4846320"/>
+            <a:ext cx="5486400" cy="1188720"/>
+          </a:xfrm>
+          <a:prstGeom prst="roundRect">
+            <a:avLst>
+              <a:gd name="adj" fmla="val 3846"/>
+            </a:avLst>
+          </a:prstGeom>
+          <a:solidFill>
+            <a:srgbClr val="0B2F3A"/>
+          </a:solidFill>
+          <a:ln w="12700">
+            <a:solidFill>
+              <a:srgbClr val="0B2F3A"/>
+            </a:solidFill>
+            <a:prstDash val="solid"/>
+          </a:ln>
+        </p:spPr>
+      </p:sp>
+      <p:sp>
+        <p:nvSpPr>
+          <p:cNvPr id="5" name="Text 2"/>
+          <p:cNvSpPr txBox="1"/>
+          <p:nvPr/>
+        </p:nvSpPr>
+        <p:spPr>
+          <a:xfrm>
+            <a:off x="777240" y="4983480"/>
+            <a:ext cx="5029200" cy="274320"/>
+          </a:xfrm>
+          <a:prstGeom prst="rect">
+            <a:avLst/>
+          </a:prstGeom>
+          <a:noFill/>
+          <a:ln/>
+        </p:spPr>
+        <p:txBody>
+          <a:bodyPr wrap="square" lIns="0" tIns="0" rIns="0" bIns="0" rtlCol="0" anchor="ctr"/>
+          <a:lstStyle/>
+          <a:p>
+            <a:pPr indent="0" marL="0">
+              <a:buNone/>
+            </a:pPr>
+            <a:r>
+              <a:rPr lang="en-US" sz="1300" b="1" dirty="0">
+                <a:solidFill>
+                  <a:srgbClr val="00C2A8"/>
+                </a:solidFill>
+                <a:latin typeface="Calibri" pitchFamily="34" charset="0"/>
+                <a:ea typeface="Calibri" pitchFamily="34" charset="-122"/>
+                <a:cs typeface="Calibri" pitchFamily="34" charset="-120"/>
+              </a:rPr>
+              <a:t>Adding information made it worse</a:t>
+            </a:r>
+            <a:endParaRPr lang="en-US" sz="1300" dirty="0"/>
+          </a:p>
+        </p:txBody>
+      </p:sp>
+      <p:sp>
+        <p:nvSpPr>
+          <p:cNvPr id="6" name="Text 3"/>
+          <p:cNvSpPr txBox="1"/>
+          <p:nvPr/>
+        </p:nvSpPr>
+        <p:spPr>
+          <a:xfrm>
+            <a:off x="777240" y="5276088"/>
+            <a:ext cx="5029200" cy="640080"/>
+          </a:xfrm>
+          <a:prstGeom prst="rect">
+            <a:avLst/>
+          </a:prstGeom>
+          <a:noFill/>
+          <a:ln/>
+        </p:spPr>
+        <p:txBody>
+          <a:bodyPr wrap="square" lIns="0" tIns="0" rIns="0" bIns="0" rtlCol="0" anchor="ctr"/>
+          <a:lstStyle/>
+          <a:p>
+            <a:pPr indent="0" marL="0">
+              <a:buNone/>
+            </a:pPr>
+            <a:r>
+              <a:rPr lang="en-US" sz="1200" dirty="0">
+                <a:solidFill>
+                  <a:srgbClr val="D6E6EA"/>
+                </a:solidFill>
+                <a:latin typeface="Calibri" pitchFamily="34" charset="0"/>
+                <a:ea typeface="Calibri" pitchFamily="34" charset="-122"/>
+                <a:cs typeface="Calibri" pitchFamily="34" charset="-120"/>
+              </a:rPr>
+              <a:t>33 features score -0.070; 193 score -0.097. When more information makes a model worse, it is fitting noise.</a:t>
+            </a:r>
+            <a:endParaRPr lang="en-US" sz="1200" dirty="0"/>
+          </a:p>
+        </p:txBody>
+      </p:sp>
+      <p:sp>
+        <p:nvSpPr>
+          <p:cNvPr id="7" name="Shape 4"/>
+          <p:cNvSpPr/>
+          <p:nvPr/>
+        </p:nvSpPr>
+        <p:spPr>
+          <a:xfrm>
+            <a:off x="6263640" y="4846320"/>
+            <a:ext cx="5440680" cy="1188720"/>
+          </a:xfrm>
+          <a:prstGeom prst="roundRect">
+            <a:avLst>
+              <a:gd name="adj" fmla="val 3846"/>
+            </a:avLst>
+          </a:prstGeom>
+          <a:solidFill>
+            <a:srgbClr val="FBEFEF"/>
+          </a:solidFill>
+          <a:ln w="12700">
+            <a:solidFill>
+              <a:srgbClr val="FBEFEF"/>
+            </a:solidFill>
+            <a:prstDash val="solid"/>
+          </a:ln>
+        </p:spPr>
+      </p:sp>
+      <p:sp>
+        <p:nvSpPr>
+          <p:cNvPr id="8" name="Text 5"/>
+          <p:cNvSpPr txBox="1"/>
+          <p:nvPr/>
+        </p:nvSpPr>
+        <p:spPr>
+          <a:xfrm>
+            <a:off x="6492240" y="4983480"/>
+            <a:ext cx="4983480" cy="274320"/>
+          </a:xfrm>
+          <a:prstGeom prst="rect">
+            <a:avLst/>
+          </a:prstGeom>
+          <a:noFill/>
+          <a:ln/>
+        </p:spPr>
+        <p:txBody>
+          <a:bodyPr wrap="square" lIns="0" tIns="0" rIns="0" bIns="0" rtlCol="0" anchor="ctr"/>
+          <a:lstStyle/>
+          <a:p>
+            <a:pPr indent="0" marL="0">
+              <a:buNone/>
+            </a:pPr>
+            <a:r>
+              <a:rPr lang="en-US" sz="1300" b="1" dirty="0">
+                <a:solidFill>
+                  <a:srgbClr val="C62828"/>
+                </a:solidFill>
+                <a:latin typeface="Calibri" pitchFamily="34" charset="0"/>
+                <a:ea typeface="Calibri" pitchFamily="34" charset="-122"/>
+                <a:cs typeface="Calibri" pitchFamily="34" charset="-120"/>
+              </a:rPr>
+              <a:t>And the clinical score runs backwards</a:t>
+            </a:r>
+            <a:endParaRPr lang="en-US" sz="1300" dirty="0"/>
+          </a:p>
+        </p:txBody>
+      </p:sp>
+      <p:sp>
+        <p:nvSpPr>
+          <p:cNvPr id="9" name="Text 6"/>
+          <p:cNvSpPr txBox="1"/>
+          <p:nvPr/>
+        </p:nvSpPr>
+        <p:spPr>
+          <a:xfrm>
+            <a:off x="6492240" y="5276088"/>
+            <a:ext cx="4983480" cy="640080"/>
+          </a:xfrm>
+          <a:prstGeom prst="rect">
+            <a:avLst/>
+          </a:prstGeom>
+          <a:noFill/>
+          <a:ln/>
+        </p:spPr>
+        <p:txBody>
+          <a:bodyPr wrap="square" lIns="0" tIns="0" rIns="0" bIns="0" rtlCol="0" anchor="ctr"/>
+          <a:lstStyle/>
+          <a:p>
+            <a:pPr indent="0" marL="0">
+              <a:buNone/>
+            </a:pPr>
+            <a:r>
+              <a:rPr lang="en-US" sz="1200" dirty="0">
+                <a:solidFill>
+                  <a:srgbClr val="0B2F3A"/>
+                </a:solidFill>
+                <a:latin typeface="Calibri" pitchFamily="34" charset="0"/>
+                <a:ea typeface="Calibri" pitchFamily="34" charset="-122"/>
+                <a:cs typeface="Calibri" pitchFamily="34" charset="-120"/>
+              </a:rPr>
+              <a:t>The models with the WORST R-squared (-0.106) carry the HIGHEST Zone A+B (91.5%). Not weak - inverted.</a:t>
+            </a:r>
+            <a:endParaRPr lang="en-US" sz="1200" dirty="0"/>
+          </a:p>
+        </p:txBody>
+      </p:sp>
+    </p:spTree>
+  </p:cSld>
+  <p:clrMapOvr>
+    <a:masterClrMapping/>
+  </p:clrMapOvr>
+</p:sld>
+</file>
+
+<file path=ppt/slides/slide15.xml><?xml version="1.0" encoding="utf-8"?>
+<p:sld xmlns:a="http://schemas.openxmlformats.org/drawingml/2006/main" xmlns:r="http://schemas.openxmlformats.org/officeDocument/2006/relationships" xmlns:p="http://schemas.openxmlformats.org/presentationml/2006/main">
+  <p:cSld name="Slide 15">
+    <p:bg>
+      <p:bgPr>
+        <a:solidFill>
+          <a:srgbClr val="FFFFFF"/>
+        </a:solidFill>
+      </p:bgPr>
+    </p:bg>
+    <p:spTree>
+      <p:nvGrpSpPr>
+        <p:cNvPr id="1" name=""/>
+        <p:cNvGrpSpPr/>
+        <p:nvPr/>
+      </p:nvGrpSpPr>
+      <p:grpSpPr>
+        <a:xfrm>
+          <a:off x="0" y="0"/>
+          <a:ext cx="0" cy="0"/>
+          <a:chOff x="0" y="0"/>
+          <a:chExt cx="0" cy="0"/>
+        </a:xfrm>
+      </p:grpSpPr>
+      <p:sp>
+        <p:nvSpPr>
+          <p:cNvPr id="2" name="Text 0"/>
+          <p:cNvSpPr txBox="1"/>
+          <p:nvPr/>
+        </p:nvSpPr>
+        <p:spPr>
+          <a:xfrm>
+            <a:off x="548640" y="384048"/>
+            <a:ext cx="11094415" cy="868680"/>
+          </a:xfrm>
+          <a:prstGeom prst="rect">
+            <a:avLst/>
+          </a:prstGeom>
+          <a:noFill/>
+          <a:ln/>
+        </p:spPr>
+        <p:txBody>
+          <a:bodyPr wrap="square" rtlCol="0" anchor="t"/>
+          <a:lstStyle/>
+          <a:p>
+            <a:pPr indent="0" marL="0">
+              <a:buNone/>
+            </a:pPr>
+            <a:r>
+              <a:rPr lang="en-US" sz="2700" b="1" dirty="0">
+                <a:solidFill>
+                  <a:srgbClr val="0B2F3A"/>
+                </a:solidFill>
+                <a:latin typeface="Cambria" pitchFamily="34" charset="0"/>
+                <a:ea typeface="Cambria" pitchFamily="34" charset="-122"/>
+                <a:cs typeface="Cambria" pitchFamily="34" charset="-120"/>
+              </a:rPr>
+              <a:t>Finding 5: a standard feature library returns different answers for identical input</a:t>
             </a:r>
             <a:endParaRPr lang="en-US" sz="2700" dirty="0"/>
           </a:p>
@@ -7582,7 +7974,7 @@
       </p:sp>
       <p:graphicFrame>
         <p:nvGraphicFramePr>
-          <p:cNvPr id="15" name="Table 0"/>
+          <p:cNvPr id="16" name="Table 0"/>
           <p:cNvGraphicFramePr>
             <a:graphicFrameLocks noGrp="1"/>
           </p:cNvGraphicFramePr>
@@ -8498,9 +8890,9 @@
 </p:sld>
 </file>
 
-<file path=ppt/slides/slide15.xml><?xml version="1.0" encoding="utf-8"?>
+<file path=ppt/slides/slide16.xml><?xml version="1.0" encoding="utf-8"?>
 <p:sld xmlns:a="http://schemas.openxmlformats.org/drawingml/2006/main" xmlns:r="http://schemas.openxmlformats.org/officeDocument/2006/relationships" xmlns:p="http://schemas.openxmlformats.org/presentationml/2006/main">
-  <p:cSld name="Slide 15">
+  <p:cSld name="Slide 16">
     <p:bg>
       <p:bgPr>
         <a:solidFill>
@@ -9242,9 +9634,9 @@
 </p:sld>
 </file>
 
-<file path=ppt/slides/slide16.xml><?xml version="1.0" encoding="utf-8"?>
+<file path=ppt/slides/slide17.xml><?xml version="1.0" encoding="utf-8"?>
 <p:sld xmlns:a="http://schemas.openxmlformats.org/drawingml/2006/main" xmlns:r="http://schemas.openxmlformats.org/officeDocument/2006/relationships" xmlns:p="http://schemas.openxmlformats.org/presentationml/2006/main">
-  <p:cSld name="Slide 16">
+  <p:cSld name="Slide 17">
     <p:bg>
       <p:bgPr>
         <a:solidFill>
